--- a/Projeto de Software e Segurança da Informação - 2026/Projeto de Software/Aula 01 - Aula Inaugural/Aula Inaugural - 10 grupos.pptx
+++ b/Projeto de Software e Segurança da Informação - 2026/Projeto de Software/Aula 01 - Aula Inaugural/Aula Inaugural - 10 grupos.pptx
@@ -19172,8 +19172,8 @@
           </a:p>
         </p:txBody>
       </p:sp>
-      <mc:AlternateContent xmlns:mc="http://schemas.openxmlformats.org/markup-compatibility/2006">
-        <mc:Choice xmlns:a14="http://schemas.microsoft.com/office/drawing/2010/main" Requires="a14">
+      <mc:AlternateContent xmlns:mc="http://schemas.openxmlformats.org/markup-compatibility/2006" xmlns:a14="http://schemas.microsoft.com/office/drawing/2010/main">
+        <mc:Choice Requires="a14">
           <p:sp>
             <p:nvSpPr>
               <p:cNvPr id="3" name="Espaço Reservado para Conteúdo 2">
@@ -19229,10 +19229,14 @@
                 </a:pPr>
                 <a:r>
                   <a:rPr lang="pt-BR" sz="1800" dirty="0"/>
-                  <a:t>Para saber os temas para a apresentação, clique </a:t>
+                  <a:t>Para saber os temas para a apresentação</a:t>
                 </a:r>
                 <a:r>
-                  <a:rPr lang="pt-BR" sz="1800" dirty="0">
+                  <a:rPr lang="pt-BR" sz="1800"/>
+                  <a:t>, clique </a:t>
+                </a:r>
+                <a:r>
+                  <a:rPr lang="pt-BR" sz="1800">
                     <a:hlinkClick r:id="rId2"/>
                   </a:rPr>
                   <a:t>Aqui</a:t>
@@ -19374,7 +19378,7 @@
             </p:txBody>
           </p:sp>
         </mc:Choice>
-        <mc:Fallback>
+        <mc:Fallback xmlns="">
           <p:sp>
             <p:nvSpPr>
               <p:cNvPr id="3" name="Espaço Reservado para Conteúdo 2">
@@ -24091,8 +24095,8 @@
           </a:p>
         </p:txBody>
       </p:sp>
-      <mc:AlternateContent xmlns:mc="http://schemas.openxmlformats.org/markup-compatibility/2006" xmlns:a14="http://schemas.microsoft.com/office/drawing/2010/main">
-        <mc:Choice Requires="a14">
+      <mc:AlternateContent xmlns:mc="http://schemas.openxmlformats.org/markup-compatibility/2006">
+        <mc:Choice xmlns:a14="http://schemas.microsoft.com/office/drawing/2010/main" Requires="a14">
           <p:sp>
             <p:nvSpPr>
               <p:cNvPr id="3" name="Espaço Reservado para Conteúdo 2">
@@ -24111,8 +24115,8 @@
             </p:nvSpPr>
             <p:spPr>
               <a:xfrm>
-                <a:off x="592347" y="1917540"/>
-                <a:ext cx="11007306" cy="2362200"/>
+                <a:off x="592347" y="1917539"/>
+                <a:ext cx="11007306" cy="4296993"/>
               </a:xfrm>
             </p:spPr>
             <p:txBody>
@@ -24139,6 +24143,22 @@
                   <a:rPr lang="pt-BR" sz="1800" dirty="0"/>
                   <a:t>Apresentação do Projeto Final – 10/06 e 12/06</a:t>
                 </a:r>
+              </a:p>
+              <a:p>
+                <a:pPr marL="1028700" lvl="1" indent="-342900">
+                  <a:spcBef>
+                    <a:spcPts val="0"/>
+                  </a:spcBef>
+                </a:pPr>
+                <a:r>
+                  <a:rPr lang="pt-BR" sz="1800" dirty="0"/>
+                  <a:t>Como deve ser a apresentação do projeto</a:t>
+                </a:r>
+                <a:r>
+                  <a:rPr lang="pt-BR" sz="1800"/>
+                  <a:t>, </a:t>
+                </a:r>
+                <a:endParaRPr lang="pt-BR" sz="1800" dirty="0"/>
               </a:p>
               <a:p>
                 <a:pPr marL="1028700" lvl="1" indent="-342900">
@@ -24263,7 +24283,7 @@
             </p:txBody>
           </p:sp>
         </mc:Choice>
-        <mc:Fallback xmlns="">
+        <mc:Fallback>
           <p:sp>
             <p:nvSpPr>
               <p:cNvPr id="3" name="Espaço Reservado para Conteúdo 2">
@@ -24282,8 +24302,8 @@
             </p:nvSpPr>
             <p:spPr>
               <a:xfrm>
-                <a:off x="592347" y="1917540"/>
-                <a:ext cx="11007306" cy="2362200"/>
+                <a:off x="592347" y="1917539"/>
+                <a:ext cx="11007306" cy="4296993"/>
               </a:xfrm>
               <a:blipFill>
                 <a:blip r:embed="rId2"/>

--- a/Projeto de Software e Segurança da Informação - 2026/Projeto de Software/Aula 01 - Aula Inaugural/Aula Inaugural - 10 grupos.pptx
+++ b/Projeto de Software e Segurança da Informação - 2026/Projeto de Software/Aula 01 - Aula Inaugural/Aula Inaugural - 10 grupos.pptx
@@ -19172,8 +19172,8 @@
           </a:p>
         </p:txBody>
       </p:sp>
-      <mc:AlternateContent xmlns:mc="http://schemas.openxmlformats.org/markup-compatibility/2006" xmlns:a14="http://schemas.microsoft.com/office/drawing/2010/main">
-        <mc:Choice Requires="a14">
+      <mc:AlternateContent xmlns:mc="http://schemas.openxmlformats.org/markup-compatibility/2006">
+        <mc:Choice xmlns:a14="http://schemas.microsoft.com/office/drawing/2010/main" Requires="a14">
           <p:sp>
             <p:nvSpPr>
               <p:cNvPr id="3" name="Espaço Reservado para Conteúdo 2">
@@ -19218,7 +19218,7 @@
                 </a:pPr>
                 <a:r>
                   <a:rPr lang="pt-BR" sz="1800" dirty="0"/>
-                  <a:t>Apresentação sobre ISO 27001 E ISO 27002 – 15/04 e 17/04</a:t>
+                  <a:t>Apresentação sobre ISO 27001 E ISO 27002 – 14/04 e 16/04</a:t>
                 </a:r>
               </a:p>
               <a:p>
@@ -19229,14 +19229,10 @@
                 </a:pPr>
                 <a:r>
                   <a:rPr lang="pt-BR" sz="1800" dirty="0"/>
-                  <a:t>Para saber os temas para a apresentação</a:t>
+                  <a:t>Para saber os temas para a apresentação, clique </a:t>
                 </a:r>
                 <a:r>
-                  <a:rPr lang="pt-BR" sz="1800"/>
-                  <a:t>, clique </a:t>
-                </a:r>
-                <a:r>
-                  <a:rPr lang="pt-BR" sz="1800">
+                  <a:rPr lang="pt-BR" sz="1800" dirty="0">
                     <a:hlinkClick r:id="rId2"/>
                   </a:rPr>
                   <a:t>Aqui</a:t>
@@ -19251,7 +19247,7 @@
                 </a:pPr>
                 <a:r>
                   <a:rPr lang="pt-BR" sz="1800" dirty="0"/>
-                  <a:t>Prova – 22/04</a:t>
+                  <a:t>Prova – 23/04</a:t>
                 </a:r>
                 <a:endParaRPr lang="pt-BR" dirty="0"/>
               </a:p>
@@ -19267,105 +19263,103 @@
                 </a:r>
               </a:p>
               <a:p>
-                <a:pPr marL="342900" indent="-342900">
+                <a:pPr marL="342900" indent="-342900" algn="ctr">
                   <a:spcBef>
                     <a:spcPts val="0"/>
                   </a:spcBef>
                 </a:pPr>
                 <a14:m>
-                  <m:oMathPara xmlns:m="http://schemas.openxmlformats.org/officeDocument/2006/math">
-                    <m:oMathParaPr>
-                      <m:jc m:val="centerGroup"/>
-                    </m:oMathParaPr>
-                    <m:oMath xmlns:m="http://schemas.openxmlformats.org/officeDocument/2006/math">
-                      <m:r>
-                        <a:rPr lang="pt-BR" b="0" i="1" smtClean="0">
-                          <a:latin typeface="Cambria Math" panose="02040503050406030204" pitchFamily="18" charset="0"/>
-                        </a:rPr>
-                        <m:t>𝑁𝑜𝑡𝑎</m:t>
-                      </m:r>
-                      <m:r>
-                        <a:rPr lang="pt-BR" b="0" i="1" smtClean="0">
-                          <a:latin typeface="Cambria Math" panose="02040503050406030204" pitchFamily="18" charset="0"/>
-                        </a:rPr>
-                        <m:t> </m:t>
-                      </m:r>
-                      <m:r>
-                        <a:rPr lang="pt-BR" b="0" i="1" smtClean="0">
-                          <a:latin typeface="Cambria Math" panose="02040503050406030204" pitchFamily="18" charset="0"/>
-                        </a:rPr>
-                        <m:t>𝐹𝑖𝑛𝑎𝑙</m:t>
-                      </m:r>
-                      <m:r>
-                        <a:rPr lang="pt-BR" i="1" smtClean="0">
-                          <a:latin typeface="Cambria Math" panose="02040503050406030204" pitchFamily="18" charset="0"/>
-                        </a:rPr>
-                        <m:t>=</m:t>
-                      </m:r>
-                      <m:r>
-                        <a:rPr lang="pt-BR" b="0" i="1" smtClean="0">
-                          <a:latin typeface="Cambria Math" panose="02040503050406030204" pitchFamily="18" charset="0"/>
-                        </a:rPr>
-                        <m:t>𝑁𝑜𝑡𝑎</m:t>
-                      </m:r>
-                      <m:r>
-                        <a:rPr lang="pt-BR" b="0" i="1" smtClean="0">
-                          <a:latin typeface="Cambria Math" panose="02040503050406030204" pitchFamily="18" charset="0"/>
-                        </a:rPr>
-                        <m:t> </m:t>
-                      </m:r>
-                      <m:r>
-                        <a:rPr lang="pt-BR" b="0" i="1" smtClean="0">
-                          <a:latin typeface="Cambria Math" panose="02040503050406030204" pitchFamily="18" charset="0"/>
-                        </a:rPr>
-                        <m:t>𝑃𝑟𝑜𝑣𝑎</m:t>
-                      </m:r>
-                      <m:r>
-                        <a:rPr lang="pt-BR" b="0" i="1" smtClean="0">
-                          <a:latin typeface="Cambria Math" panose="02040503050406030204" pitchFamily="18" charset="0"/>
-                        </a:rPr>
-                        <m:t> ∗ 0,7+</m:t>
-                      </m:r>
-                      <m:r>
-                        <a:rPr lang="pt-BR" b="0" i="1" smtClean="0">
-                          <a:latin typeface="Cambria Math" panose="02040503050406030204" pitchFamily="18" charset="0"/>
-                        </a:rPr>
-                        <m:t>𝑁𝑜𝑡𝑎</m:t>
-                      </m:r>
-                      <m:r>
-                        <a:rPr lang="pt-BR" b="0" i="1" smtClean="0">
-                          <a:latin typeface="Cambria Math" panose="02040503050406030204" pitchFamily="18" charset="0"/>
-                        </a:rPr>
-                        <m:t> </m:t>
-                      </m:r>
-                      <m:r>
-                        <a:rPr lang="pt-BR" b="0" i="1" smtClean="0">
-                          <a:latin typeface="Cambria Math" panose="02040503050406030204" pitchFamily="18" charset="0"/>
-                        </a:rPr>
-                        <m:t>𝐴𝑝𝑟𝑒𝑠𝑒𝑛𝑡𝑎</m:t>
-                      </m:r>
-                      <m:r>
-                        <a:rPr lang="pt-BR" b="0" i="1" smtClean="0">
-                          <a:latin typeface="Cambria Math" panose="02040503050406030204" pitchFamily="18" charset="0"/>
-                        </a:rPr>
-                        <m:t>çã</m:t>
-                      </m:r>
-                      <m:r>
-                        <a:rPr lang="pt-BR" b="0" i="1" smtClean="0">
-                          <a:latin typeface="Cambria Math" panose="02040503050406030204" pitchFamily="18" charset="0"/>
-                        </a:rPr>
-                        <m:t>𝑜</m:t>
-                      </m:r>
-                      <m:r>
-                        <a:rPr lang="pt-BR" b="0" i="1" smtClean="0">
-                          <a:latin typeface="Cambria Math" panose="02040503050406030204" pitchFamily="18" charset="0"/>
-                        </a:rPr>
-                        <m:t> ∗ 0,3</m:t>
-                      </m:r>
-                    </m:oMath>
-                  </m:oMathPara>
+                  <m:oMath xmlns:m="http://schemas.openxmlformats.org/officeDocument/2006/math">
+                    <m:r>
+                      <a:rPr lang="pt-BR" b="0" i="1" smtClean="0">
+                        <a:latin typeface="Cambria Math" panose="02040503050406030204" pitchFamily="18" charset="0"/>
+                      </a:rPr>
+                      <m:t>𝑁𝑜𝑡𝑎</m:t>
+                    </m:r>
+                    <m:r>
+                      <a:rPr lang="pt-BR" b="0" i="1" smtClean="0">
+                        <a:latin typeface="Cambria Math" panose="02040503050406030204" pitchFamily="18" charset="0"/>
+                      </a:rPr>
+                      <m:t> </m:t>
+                    </m:r>
+                    <m:r>
+                      <a:rPr lang="pt-BR" b="0" i="1" smtClean="0">
+                        <a:latin typeface="Cambria Math" panose="02040503050406030204" pitchFamily="18" charset="0"/>
+                      </a:rPr>
+                      <m:t>𝑀</m:t>
+                    </m:r>
+                    <m:r>
+                      <a:rPr lang="pt-BR" b="0" i="1" smtClean="0">
+                        <a:latin typeface="Cambria Math" panose="02040503050406030204" pitchFamily="18" charset="0"/>
+                      </a:rPr>
+                      <m:t>1=</m:t>
+                    </m:r>
+                    <m:r>
+                      <a:rPr lang="pt-BR" b="0" i="1" smtClean="0">
+                        <a:latin typeface="Cambria Math" panose="02040503050406030204" pitchFamily="18" charset="0"/>
+                      </a:rPr>
+                      <m:t>𝑁𝑜𝑡𝑎</m:t>
+                    </m:r>
+                    <m:r>
+                      <a:rPr lang="pt-BR" b="0" i="1" smtClean="0">
+                        <a:latin typeface="Cambria Math" panose="02040503050406030204" pitchFamily="18" charset="0"/>
+                      </a:rPr>
+                      <m:t> </m:t>
+                    </m:r>
+                    <m:r>
+                      <a:rPr lang="pt-BR" b="0" i="1" smtClean="0">
+                        <a:latin typeface="Cambria Math" panose="02040503050406030204" pitchFamily="18" charset="0"/>
+                      </a:rPr>
+                      <m:t>𝑃𝑟𝑜𝑣𝑎</m:t>
+                    </m:r>
+                    <m:r>
+                      <a:rPr lang="pt-BR" b="0" i="1" smtClean="0">
+                        <a:latin typeface="Cambria Math" panose="02040503050406030204" pitchFamily="18" charset="0"/>
+                      </a:rPr>
+                      <m:t> ∗0,6+</m:t>
+                    </m:r>
+                    <m:r>
+                      <a:rPr lang="pt-BR" b="0" i="1" smtClean="0">
+                        <a:latin typeface="Cambria Math" panose="02040503050406030204" pitchFamily="18" charset="0"/>
+                      </a:rPr>
+                      <m:t>𝑁𝑜𝑡𝑎</m:t>
+                    </m:r>
+                    <m:r>
+                      <a:rPr lang="pt-BR" b="0" i="1" smtClean="0">
+                        <a:latin typeface="Cambria Math" panose="02040503050406030204" pitchFamily="18" charset="0"/>
+                      </a:rPr>
+                      <m:t> </m:t>
+                    </m:r>
+                    <m:r>
+                      <a:rPr lang="pt-BR" b="0" i="1" smtClean="0">
+                        <a:latin typeface="Cambria Math" panose="02040503050406030204" pitchFamily="18" charset="0"/>
+                      </a:rPr>
+                      <m:t>𝐴𝑝𝑟𝑒𝑠𝑒𝑛𝑡𝑎</m:t>
+                    </m:r>
+                    <m:r>
+                      <a:rPr lang="pt-BR" b="0" i="1" smtClean="0">
+                        <a:latin typeface="Cambria Math" panose="02040503050406030204" pitchFamily="18" charset="0"/>
+                      </a:rPr>
+                      <m:t>çã</m:t>
+                    </m:r>
+                    <m:r>
+                      <a:rPr lang="pt-BR" b="0" i="1" smtClean="0">
+                        <a:latin typeface="Cambria Math" panose="02040503050406030204" pitchFamily="18" charset="0"/>
+                      </a:rPr>
+                      <m:t>𝑜</m:t>
+                    </m:r>
+                    <m:r>
+                      <a:rPr lang="pt-BR" b="0" i="1" smtClean="0">
+                        <a:latin typeface="Cambria Math" panose="02040503050406030204" pitchFamily="18" charset="0"/>
+                      </a:rPr>
+                      <m:t> ∗ 0,</m:t>
+                    </m:r>
+                  </m:oMath>
                 </a14:m>
-                <a:endParaRPr lang="pt-BR" dirty="0"/>
+                <a:r>
+                  <a:rPr lang="pt-BR" dirty="0"/>
+                  <a:t>4</a:t>
+                </a:r>
               </a:p>
               <a:p>
                 <a:pPr>
@@ -19378,7 +19372,7 @@
             </p:txBody>
           </p:sp>
         </mc:Choice>
-        <mc:Fallback xmlns="">
+        <mc:Fallback>
           <p:sp>
             <p:nvSpPr>
               <p:cNvPr id="3" name="Espaço Reservado para Conteúdo 2">
@@ -24141,7 +24135,7 @@
                 </a:pPr>
                 <a:r>
                   <a:rPr lang="pt-BR" sz="1800" dirty="0"/>
-                  <a:t>Apresentação do Projeto Final – 10/06 e 12/06</a:t>
+                  <a:t>Apresentação do Projeto Final – 02/06 e 09/06</a:t>
                 </a:r>
               </a:p>
               <a:p>
@@ -24152,11 +24146,21 @@
                 </a:pPr>
                 <a:r>
                   <a:rPr lang="pt-BR" sz="1800" dirty="0"/>
-                  <a:t>Como deve ser a apresentação do projeto</a:t>
+                  <a:t>A apresentação deve ser em formato </a:t>
                 </a:r>
                 <a:r>
-                  <a:rPr lang="pt-BR" sz="1800"/>
-                  <a:t>, </a:t>
+                  <a:rPr lang="pt-BR" sz="1800" dirty="0" err="1"/>
+                  <a:t>pitch</a:t>
+                </a:r>
+                <a:r>
+                  <a:rPr lang="pt-BR" sz="1800" dirty="0"/>
+                  <a:t>, clique </a:t>
+                </a:r>
+                <a:r>
+                  <a:rPr lang="pt-BR" sz="1800" dirty="0">
+                    <a:hlinkClick r:id="rId2"/>
+                  </a:rPr>
+                  <a:t>aqui</a:t>
                 </a:r>
                 <a:endParaRPr lang="pt-BR" sz="1800" dirty="0"/>
               </a:p>
@@ -24168,7 +24172,11 @@
                 </a:pPr>
                 <a:r>
                   <a:rPr lang="pt-BR" sz="1800" dirty="0"/>
-                  <a:t>Prova – 17/06</a:t>
+                  <a:t>Prova </a:t>
+                </a:r>
+                <a:r>
+                  <a:rPr lang="pt-BR" sz="1800"/>
+                  <a:t>– 11/06</a:t>
                 </a:r>
                 <a:endParaRPr lang="pt-BR" dirty="0"/>
               </a:p>
@@ -24211,13 +24219,13 @@
                         <a:rPr lang="pt-BR" b="0" i="1" smtClean="0">
                           <a:latin typeface="Cambria Math" panose="02040503050406030204" pitchFamily="18" charset="0"/>
                         </a:rPr>
-                        <m:t>𝐹𝑖𝑛𝑎𝑙</m:t>
+                        <m:t>𝑀</m:t>
                       </m:r>
                       <m:r>
-                        <a:rPr lang="pt-BR" i="1" smtClean="0">
+                        <a:rPr lang="pt-BR" b="0" i="1" smtClean="0">
                           <a:latin typeface="Cambria Math" panose="02040503050406030204" pitchFamily="18" charset="0"/>
                         </a:rPr>
-                        <m:t>=</m:t>
+                        <m:t>2=</m:t>
                       </m:r>
                       <m:r>
                         <a:rPr lang="pt-BR" b="0" i="1" smtClean="0">
@@ -24306,7 +24314,7 @@
                 <a:ext cx="11007306" cy="4296993"/>
               </a:xfrm>
               <a:blipFill>
-                <a:blip r:embed="rId2"/>
+                <a:blip r:embed="rId3"/>
                 <a:stretch>
                   <a:fillRect l="-554"/>
                 </a:stretch>
